--- a/dist/초6/사회·역사/세계와공존/초6_사회·역사_세계와공존_01_세계여러나라_학생용.pptx
+++ b/dist/초6/사회·역사/세계와공존/초6_사회·역사_세계와공존_01_세계여러나라_학생용.pptx
@@ -120,13 +120,13 @@
   <p:extLst>
     <p:ext uri="{521415D9-36F7-43E2-AB2F-B90AF26B5E84}">
       <p14:sectionLst xmlns:p14="http://schemas.microsoft.com/office/powerpoint/2010/main">
-        <p14:section name="도입" id="{d92287d0-a6ff-f083-4524-d48b6b00b1d5}">
+        <p14:section name="도입" id="{1540f9e6-491d-a804-e410-220fee520f7c}">
           <p14:sldIdLst>
             <p14:sldId id="256"/>
             <p14:sldId id="257"/>
           </p14:sldIdLst>
         </p14:section>
-        <p14:section name="개념" id="{a2a9c14f-a6ca-be43-4887-3f0252aaee42}">
+        <p14:section name="개념" id="{7d66ade1-dc78-a51a-cc69-36bffd4e093f}">
           <p14:sldIdLst>
             <p14:sldId id="258"/>
             <p14:sldId id="259"/>
@@ -134,7 +134,7 @@
             <p14:sldId id="263"/>
           </p14:sldIdLst>
         </p14:section>
-        <p14:section name="연습" id="{e1025d61-dfd2-02ba-e598-b91c61c1257d}">
+        <p14:section name="연습" id="{670c8b23-102f-3a55-6afc-5ac516d528fe}">
           <p14:sldIdLst>
             <p14:sldId id="260"/>
             <p14:sldId id="262"/>
@@ -142,30 +142,30 @@
             <p14:sldId id="265"/>
           </p14:sldIdLst>
         </p14:section>
-        <p14:section name="개념" id="{bd391201-7170-f6d1-f321-18cb7a2c899f}">
+        <p14:section name="개념" id="{5ef635e3-7669-757b-f918-de28f6c7a7a4}">
           <p14:sldIdLst/>
         </p14:section>
-        <p14:section name="연습" id="{22d4f521-94ee-d0dd-be0e-017f657c0940}">
+        <p14:section name="연습" id="{454512a8-15d7-9924-9f1b-754725a259ac}">
           <p14:sldIdLst/>
         </p14:section>
-        <p14:section name="개념" id="{c3793a49-e728-6f61-f1a5-648c5a801af5}">
+        <p14:section name="개념" id="{38cd79ba-b9bb-02f5-a13d-edbd30b89078}">
           <p14:sldIdLst/>
         </p14:section>
-        <p14:section name="연습" id="{3074dbed-1392-fe15-372f-2b7ab4549901}">
+        <p14:section name="연습" id="{23648c91-033c-46cd-318f-7b51c35f3c41}">
           <p14:sldIdLst/>
         </p14:section>
-        <p14:section name="확인" id="{fb4c59e2-1f26-07c5-b44a-84116cba70c9}">
+        <p14:section name="확인" id="{3609764c-183e-19be-bd6a-9c33d4e729cf}">
           <p14:sldIdLst>
             <p14:sldId id="266"/>
             <p14:sldId id="267"/>
           </p14:sldIdLst>
         </p14:section>
-        <p14:section name="정리" id="{f462b1bf-dda4-4615-9797-c2b5354b5733}">
+        <p14:section name="정리" id="{0c707d74-e734-a958-e8d6-c4bc6ee2f2eb}">
           <p14:sldIdLst>
             <p14:sldId id="268"/>
           </p14:sldIdLst>
         </p14:section>
-        <p14:section name="보충" id="{b345a096-cb3b-c3e9-6082-0a1dab84aeac}">
+        <p14:section name="보충" id="{b3c4ce29-2572-776f-daed-422b5df88289}">
           <p14:sldIdLst>
             <p14:sldId id="269"/>
           </p14:sldIdLst>
